--- a/docs/KG_Academy_Infraestructura_y_Base_de_Datos.pptx
+++ b/docs/KG_Academy_Infraestructura_y_Base_de_Datos.pptx
@@ -3299,7 +3299,7 @@
                 </a:solidFill>
                 <a:latin typeface="Segoe UI"/>
               </a:rPr>
-              <a:t>DOCUMENTO TECNICO  ·  VERSION 1.0</a:t>
+              <a:t>DOCUMENTO TÉCNICO  ·  VERSIÓN 1.0</a:t>
             </a:r>
           </a:p>
         </p:txBody>
@@ -3446,7 +3446,7 @@
                 </a:solidFill>
                 <a:latin typeface="Segoe UI"/>
               </a:rPr>
-              <a:t>Plataforma educativa LMS con capacidades B2C y B2B para la gestion, trazabilidad y certificacion de la formacion en Seguridad y Salud en el Trabajo.</a:t>
+              <a:t>Plataforma educativa LMS con capacidades B2C y B2B para la gestión, trazabilidad y certificación de la formación en Seguridad y Salud en el Trabajo.</a:t>
             </a:r>
           </a:p>
         </p:txBody>
@@ -3488,7 +3488,7 @@
                 </a:solidFill>
                 <a:latin typeface="Segoe UI"/>
               </a:rPr>
-              <a:t>KG GESTION INTEGRAL S.A.S.  ·  KATERINE GUANARITA</a:t>
+              <a:t>KG GESTIÓN INTEGRAL S.A.S.  ·  KATERINE GUAÑARITA</a:t>
             </a:r>
           </a:p>
           <a:p>
@@ -3507,7 +3507,7 @@
                 </a:solidFill>
                 <a:latin typeface="Segoe UI"/>
               </a:rPr>
-              <a:t>Realizado por Diego Alejandro Hernandez Blanco</a:t>
+              <a:t>Realizado por Diego Alejandro Hernández Blanco</a:t>
             </a:r>
           </a:p>
           <a:p>
@@ -3526,7 +3526,7 @@
                 </a:solidFill>
                 <a:latin typeface="Segoe UI"/>
               </a:rPr>
-              <a:t>Bogota D.C., Colombia  ·  2026</a:t>
+              <a:t>Bogotá D.C., Colombia  ·  2026</a:t>
             </a:r>
           </a:p>
         </p:txBody>
@@ -3717,7 +3717,7 @@
                 </a:solidFill>
                 <a:latin typeface="Segoe UI"/>
               </a:rPr>
-              <a:t>3. Catalogo de cursos</a:t>
+              <a:t>3. Catálogo de cursos</a:t>
             </a:r>
           </a:p>
           <a:p>
@@ -3736,7 +3736,7 @@
                 </a:solidFill>
                 <a:latin typeface="Segoe UI"/>
               </a:rPr>
-              <a:t>Estructura pedagogica y contenedores de contenido</a:t>
+              <a:t>Estructura pedagógica y contenedores de contenido</a:t>
             </a:r>
           </a:p>
         </p:txBody>
@@ -3778,7 +3778,7 @@
                 </a:solidFill>
                 <a:latin typeface="Segoe UI"/>
               </a:rPr>
-              <a:t>KG Academy  ·  KG Gestion Integral S.A.S.  ·  Desarrollado por Diego Alejandro Hernandez Blanco</a:t>
+              <a:t>KG Academy  ·  KG Gestión Integral S.A.S.  ·  Desarrollado por Diego Alejandro Hernández Blanco</a:t>
             </a:r>
           </a:p>
         </p:txBody>
@@ -3974,7 +3974,7 @@
                           </a:solidFill>
                           <a:latin typeface="Segoe UI"/>
                         </a:rPr>
-                        <a:t>Categorias y subcategorias del catalogo</a:t>
+                        <a:t>Categorías y subcategorias del catálogo</a:t>
                       </a:r>
                     </a:p>
                   </a:txBody>
@@ -4154,7 +4154,7 @@
                           </a:solidFill>
                           <a:latin typeface="Segoe UI"/>
                         </a:rPr>
-                        <a:t>Modulos del curso con su peso en el progreso</a:t>
+                        <a:t>Módulos del curso con su peso en el progreso</a:t>
                       </a:r>
                     </a:p>
                   </a:txBody>
@@ -4244,7 +4244,7 @@
                           </a:solidFill>
                           <a:latin typeface="Segoe UI"/>
                         </a:rPr>
-                        <a:t>Leccion y su contenedor de contenido</a:t>
+                        <a:t>Lección y su contenedor de contenido</a:t>
                       </a:r>
                     </a:p>
                   </a:txBody>
@@ -4334,7 +4334,7 @@
                           </a:solidFill>
                           <a:latin typeface="Segoe UI"/>
                         </a:rPr>
-                        <a:t>Anexos descargables de la leccion</a:t>
+                        <a:t>Anexos descargables de la lección</a:t>
                       </a:r>
                     </a:p>
                   </a:txBody>
@@ -4579,7 +4579,7 @@
                 </a:solidFill>
                 <a:latin typeface="Segoe UI"/>
               </a:rPr>
-              <a:t>4. Matricula, progreso y trazabilidad</a:t>
+              <a:t>4. Matrícula, progreso y trazabilidad</a:t>
             </a:r>
           </a:p>
           <a:p>
@@ -4640,7 +4640,7 @@
                 </a:solidFill>
                 <a:latin typeface="Segoe UI"/>
               </a:rPr>
-              <a:t>KG Academy  ·  KG Gestion Integral S.A.S.  ·  Desarrollado por Diego Alejandro Hernandez Blanco</a:t>
+              <a:t>KG Academy  ·  KG Gestión Integral S.A.S.  ·  Desarrollado por Diego Alejandro Hernández Blanco</a:t>
             </a:r>
           </a:p>
         </p:txBody>
@@ -4836,7 +4836,7 @@
                           </a:solidFill>
                           <a:latin typeface="Segoe UI"/>
                         </a:rPr>
-                        <a:t>Matricula del usuario en el curso</a:t>
+                        <a:t>Matrícula del usuario en el curso</a:t>
                       </a:r>
                     </a:p>
                   </a:txBody>
@@ -4880,7 +4880,7 @@
                           </a:solidFill>
                           <a:latin typeface="Segoe UI"/>
                         </a:rPr>
-                        <a:t>Unica por usuario+curso</a:t>
+                        <a:t>Única por usuario+curso</a:t>
                       </a:r>
                     </a:p>
                   </a:txBody>
@@ -4926,7 +4926,7 @@
                           </a:solidFill>
                           <a:latin typeface="Segoe UI"/>
                         </a:rPr>
-                        <a:t>Estado de avance de cada modulo</a:t>
+                        <a:t>Estado de avance de cada módulo</a:t>
                       </a:r>
                     </a:p>
                   </a:txBody>
@@ -5016,7 +5016,7 @@
                           </a:solidFill>
                           <a:latin typeface="Segoe UI"/>
                         </a:rPr>
-                        <a:t>Avance detallado leccion a leccion</a:t>
+                        <a:t>Avance detallado lección a lección</a:t>
                       </a:r>
                     </a:p>
                   </a:txBody>
@@ -5060,7 +5060,7 @@
                           </a:solidFill>
                           <a:latin typeface="Segoe UI"/>
                         </a:rPr>
-                        <a:t>Soporta "continuar donde quedo"</a:t>
+                        <a:t>Soporta "continuar donde quedó"</a:t>
                       </a:r>
                     </a:p>
                   </a:txBody>
@@ -5106,7 +5106,7 @@
                           </a:solidFill>
                           <a:latin typeface="Segoe UI"/>
                         </a:rPr>
-                        <a:t>Lote de asignacion masiva para auditoria</a:t>
+                        <a:t>Lote de asignación masiva para auditoría</a:t>
                       </a:r>
                     </a:p>
                   </a:txBody>
@@ -5502,7 +5502,7 @@
                 </a:solidFill>
                 <a:latin typeface="Segoe UI"/>
               </a:rPr>
-              <a:t>KG Academy  ·  KG Gestion Integral S.A.S.  ·  Desarrollado por Diego Alejandro Hernandez Blanco</a:t>
+              <a:t>KG Academy  ·  KG Gestión Integral S.A.S.  ·  Desarrollado por Diego Alejandro Hernández Blanco</a:t>
             </a:r>
           </a:p>
         </p:txBody>
@@ -5968,7 +5968,7 @@
                           </a:solidFill>
                           <a:latin typeface="Segoe UI"/>
                         </a:rPr>
-                        <a:t>Evaluacion diagnostica, por modulo o final</a:t>
+                        <a:t>Evaluación diagnostica, por módulo o final</a:t>
                       </a:r>
                     </a:p>
                   </a:txBody>
@@ -6058,7 +6058,7 @@
                           </a:solidFill>
                           <a:latin typeface="Segoe UI"/>
                         </a:rPr>
-                        <a:t>Preguntas que componen cada evaluacion</a:t>
+                        <a:t>Preguntas que componen cada evaluación</a:t>
                       </a:r>
                     </a:p>
                   </a:txBody>
@@ -6502,7 +6502,7 @@
                 </a:solidFill>
                 <a:latin typeface="Segoe UI"/>
               </a:rPr>
-              <a:t>Emision, verificacion y revocacion</a:t>
+              <a:t>Emisión, verificación y revocación</a:t>
             </a:r>
           </a:p>
         </p:txBody>
@@ -6544,7 +6544,7 @@
                 </a:solidFill>
                 <a:latin typeface="Segoe UI"/>
               </a:rPr>
-              <a:t>KG Academy  ·  KG Gestion Integral S.A.S.  ·  Desarrollado por Diego Alejandro Hernandez Blanco</a:t>
+              <a:t>KG Academy  ·  KG Gestión Integral S.A.S.  ·  Desarrollado por Diego Alejandro Hernández Blanco</a:t>
             </a:r>
           </a:p>
         </p:txBody>
@@ -6874,7 +6874,7 @@
                           </a:solidFill>
                           <a:latin typeface="Segoe UI"/>
                         </a:rPr>
-                        <a:t>1:1 enrollment · codigo unico</a:t>
+                        <a:t>1:1 enrollment · código único</a:t>
                       </a:r>
                     </a:p>
                   </a:txBody>
@@ -7075,7 +7075,7 @@
                 </a:solidFill>
                 <a:latin typeface="Segoe UI"/>
               </a:rPr>
-              <a:t>7. Comercial, notificaciones y gamificacion</a:t>
+              <a:t>7. Comercial, notificaciones y gamificación</a:t>
             </a:r>
           </a:p>
           <a:p>
@@ -7094,7 +7094,7 @@
                 </a:solidFill>
                 <a:latin typeface="Segoe UI"/>
               </a:rPr>
-              <a:t>Modulos de soporte al negocio y a la experiencia</a:t>
+              <a:t>Módulos de soporte al negocio y a la experiencia</a:t>
             </a:r>
           </a:p>
         </p:txBody>
@@ -7136,7 +7136,7 @@
                 </a:solidFill>
                 <a:latin typeface="Segoe UI"/>
               </a:rPr>
-              <a:t>KG Academy  ·  KG Gestion Integral S.A.S.  ·  Desarrollado por Diego Alejandro Hernandez Blanco</a:t>
+              <a:t>KG Academy  ·  KG Gestión Integral S.A.S.  ·  Desarrollado por Diego Alejandro Hernández Blanco</a:t>
             </a:r>
           </a:p>
         </p:txBody>
@@ -7692,7 +7692,7 @@
                           </a:solidFill>
                           <a:latin typeface="Segoe UI"/>
                         </a:rPr>
-                        <a:t>Notificacion enviada al usuario</a:t>
+                        <a:t>Notificación enviada al usuario</a:t>
                       </a:r>
                     </a:p>
                   </a:txBody>
@@ -7782,7 +7782,7 @@
                           </a:solidFill>
                           <a:latin typeface="Segoe UI"/>
                         </a:rPr>
-                        <a:t>Catalogo de insignias</a:t>
+                        <a:t>Catálogo de insignias</a:t>
                       </a:r>
                     </a:p>
                   </a:txBody>
@@ -7962,7 +7962,7 @@
                           </a:solidFill>
                           <a:latin typeface="Segoe UI"/>
                         </a:rPr>
-                        <a:t>Libro de puntos de gamificacion</a:t>
+                        <a:t>Libro de puntos de gamificación</a:t>
                       </a:r>
                     </a:p>
                   </a:txBody>
@@ -8358,7 +8358,7 @@
                 </a:solidFill>
                 <a:latin typeface="Segoe UI"/>
               </a:rPr>
-              <a:t>KG Academy  ·  KG Gestion Integral S.A.S.  ·  Desarrollado por Diego Alejandro Hernandez Blanco</a:t>
+              <a:t>KG Academy  ·  KG Gestión Integral S.A.S.  ·  Desarrollado por Diego Alejandro Hernández Blanco</a:t>
             </a:r>
           </a:p>
         </p:txBody>
@@ -8554,7 +8554,7 @@
                           </a:solidFill>
                           <a:latin typeface="Segoe UI"/>
                         </a:rPr>
-                        <a:t>Registro de acciones relevantes con estado antes y despues</a:t>
+                        <a:t>Registro de acciones relevantes con estado antes y después</a:t>
                       </a:r>
                     </a:p>
                   </a:txBody>
@@ -8889,7 +8889,7 @@
                 </a:solidFill>
                 <a:latin typeface="Segoe UI"/>
               </a:rPr>
-              <a:t>Motor de progreso y certificacion</a:t>
+              <a:t>Motor de progreso y certificación</a:t>
             </a:r>
           </a:p>
           <a:p>
@@ -8950,7 +8950,7 @@
                 </a:solidFill>
                 <a:latin typeface="Segoe UI"/>
               </a:rPr>
-              <a:t>KG Academy  ·  KG Gestion Integral S.A.S.  ·  Desarrollado por Diego Alejandro Hernandez Blanco</a:t>
+              <a:t>KG Academy  ·  KG Gestión Integral S.A.S.  ·  Desarrollado por Diego Alejandro Hernández Blanco</a:t>
             </a:r>
           </a:p>
         </p:txBody>
@@ -9135,7 +9135,7 @@
                 </a:solidFill>
                 <a:latin typeface="Segoe UI"/>
               </a:rPr>
-              <a:t>Registro de la leccion</a:t>
+              <a:t>Registro de la lección</a:t>
             </a:r>
           </a:p>
           <a:p>
@@ -9154,7 +9154,7 @@
                 </a:solidFill>
                 <a:latin typeface="Segoe UI"/>
               </a:rPr>
-              <a:t>Al abrir una leccion se crea o actualiza lesson_progress con tiempo, posicion y numero de vistas.</a:t>
+              <a:t>Al abrir una lección se crea o actualiza lesson_progress con tiempo, posicion y número de vistas.</a:t>
             </a:r>
           </a:p>
         </p:txBody>
@@ -9316,7 +9316,7 @@
                 </a:solidFill>
                 <a:latin typeface="Segoe UI"/>
               </a:rPr>
-              <a:t>Segun courses.progressRule: por lecciones obligatorias, por peso de lecciones o por peso de modulos.</a:t>
+              <a:t>Según courses.progressRule: por lecciones obligatorias, por peso de lecciones o por peso de módulos.</a:t>
             </a:r>
           </a:p>
         </p:txBody>
@@ -9459,7 +9459,7 @@
                 </a:solidFill>
                 <a:latin typeface="Segoe UI"/>
               </a:rPr>
-              <a:t>Estado de cada modulo</a:t>
+              <a:t>Estado de cada módulo</a:t>
             </a:r>
           </a:p>
           <a:p>
@@ -9478,7 +9478,7 @@
                 </a:solidFill>
                 <a:latin typeface="Segoe UI"/>
               </a:rPr>
-              <a:t>module_progress pasa a no iniciado, en progreso o completado segun sus lecciones.</a:t>
+              <a:t>module_progress pasa a no iniciado, en progreso o completado según sus lecciones.</a:t>
             </a:r>
           </a:p>
         </p:txBody>
@@ -9621,7 +9621,7 @@
                 </a:solidFill>
                 <a:latin typeface="Segoe UI"/>
               </a:rPr>
-              <a:t>Condicion de aprobacion</a:t>
+              <a:t>Condicion de aprobación</a:t>
             </a:r>
           </a:p>
           <a:p>
@@ -9640,7 +9640,7 @@
                 </a:solidFill>
                 <a:latin typeface="Segoe UI"/>
               </a:rPr>
-              <a:t>Curso completado = 100% de lecciones obligatorias + evaluacion final aprobada (si es exigida).</a:t>
+              <a:t>Curso completado = 100% de lecciones obligatorias + evaluación final aprobada (si es exigida).</a:t>
             </a:r>
           </a:p>
         </p:txBody>
@@ -9783,7 +9783,7 @@
                 </a:solidFill>
                 <a:latin typeface="Segoe UI"/>
               </a:rPr>
-              <a:t>Emision del certificado</a:t>
+              <a:t>Emisión del certificado</a:t>
             </a:r>
           </a:p>
           <a:p>
@@ -9802,7 +9802,7 @@
                 </a:solidFill>
                 <a:latin typeface="Segoe UI"/>
               </a:rPr>
-              <a:t>Se genera codigo unico, QR de verificacion y se congelan nombre, curso, horas y nota.</a:t>
+              <a:t>Se genera código único, QR de verificación y se congelan nombre, curso, horas y nota.</a:t>
             </a:r>
           </a:p>
         </p:txBody>
@@ -9964,7 +9964,7 @@
                 </a:solidFill>
                 <a:latin typeface="Segoe UI"/>
               </a:rPr>
-              <a:t>La asignacion de la empresa cambia de estado y el trabajador recibe la notificacion.</a:t>
+              <a:t>La asignación de la empresa cambia de estado y el trabajador recibe la notificación.</a:t>
             </a:r>
           </a:p>
         </p:txBody>
@@ -10174,7 +10174,7 @@
                 </a:solidFill>
                 <a:latin typeface="Segoe UI"/>
               </a:rPr>
-              <a:t>Nota minima aprobatoria (80 por defecto)</a:t>
+              <a:t>Nota mínima aprobatoria (80 por defecto)</a:t>
             </a:r>
           </a:p>
         </p:txBody>
@@ -10296,7 +10296,7 @@
                 </a:solidFill>
                 <a:latin typeface="Segoe UI"/>
               </a:rPr>
-              <a:t>Exige evaluacion final</a:t>
+              <a:t>Exige evaluación final</a:t>
             </a:r>
           </a:p>
         </p:txBody>
@@ -10418,7 +10418,7 @@
                 </a:solidFill>
                 <a:latin typeface="Segoe UI"/>
               </a:rPr>
-              <a:t>Emision automatica del certificado</a:t>
+              <a:t>Emisión automática del certificado</a:t>
             </a:r>
           </a:p>
         </p:txBody>
@@ -10670,7 +10670,7 @@
                 </a:solidFill>
                 <a:latin typeface="Segoe UI"/>
               </a:rPr>
-              <a:t>Control de acceso, privacidad y auditoria</a:t>
+              <a:t>Control de acceso, privacidad y auditoría</a:t>
             </a:r>
           </a:p>
           <a:p>
@@ -10731,7 +10731,7 @@
                 </a:solidFill>
                 <a:latin typeface="Segoe UI"/>
               </a:rPr>
-              <a:t>KG Academy  ·  KG Gestion Integral S.A.S.  ·  Desarrollado por Diego Alejandro Hernandez Blanco</a:t>
+              <a:t>KG Academy  ·  KG Gestión Integral S.A.S.  ·  Desarrollado por Diego Alejandro Hernández Blanco</a:t>
             </a:r>
           </a:p>
         </p:txBody>
@@ -10907,7 +10907,7 @@
                 </a:solidFill>
                 <a:latin typeface="Segoe UI"/>
               </a:rPr>
-              <a:t>Autenticacion</a:t>
+              <a:t>Autenticación</a:t>
             </a:r>
           </a:p>
           <a:p>
@@ -11060,7 +11060,7 @@
                 </a:solidFill>
                 <a:latin typeface="Segoe UI"/>
               </a:rPr>
-              <a:t>Contrasenas</a:t>
+              <a:t>Contraseñas</a:t>
             </a:r>
           </a:p>
           <a:p>
@@ -11079,7 +11079,7 @@
                 </a:solidFill>
                 <a:latin typeface="Segoe UI"/>
               </a:rPr>
-              <a:t>Hash bcrypt con 10 rondas. La contrasena nunca viaja ni se guarda en texto plano.</a:t>
+              <a:t>Hash bcrypt con 10 rondas. La contraseña nunca viaja ni se guarda en texto plano.</a:t>
             </a:r>
           </a:p>
         </p:txBody>
@@ -11232,7 +11232,7 @@
                 </a:solidFill>
                 <a:latin typeface="Segoe UI"/>
               </a:rPr>
-              <a:t>6 roles y 72 permisos granulares (modulo.accion). requireRole() protege cada layout del servidor.</a:t>
+              <a:t>6 roles y 72 permisos granulares (módulo.acción). requireRole() protege cada layout del servidor.</a:t>
             </a:r>
           </a:p>
         </p:txBody>
@@ -11385,7 +11385,7 @@
                 </a:solidFill>
                 <a:latin typeface="Segoe UI"/>
               </a:rPr>
-              <a:t>Un administrador de empresa solo consulta y modifica registros de su propio companyId; se valida en cada endpoint.</a:t>
+              <a:t>Un administrador de empresa solo consulta y modifica registros de su propio companyId; se válida en cada endpoint.</a:t>
             </a:r>
           </a:p>
         </p:txBody>
@@ -11519,7 +11519,7 @@
                 </a:solidFill>
                 <a:latin typeface="Segoe UI"/>
               </a:rPr>
-              <a:t>Proteccion de datos</a:t>
+              <a:t>Protección de datos</a:t>
             </a:r>
           </a:p>
           <a:p>
@@ -11672,7 +11672,7 @@
                 </a:solidFill>
                 <a:latin typeface="Segoe UI"/>
               </a:rPr>
-              <a:t>Auditoria</a:t>
+              <a:t>Auditoría</a:t>
             </a:r>
           </a:p>
           <a:p>
@@ -11691,7 +11691,7 @@
                 </a:solidFill>
                 <a:latin typeface="Segoe UI"/>
               </a:rPr>
-              <a:t>audit_logs conserva actor, accion, entidad, resumen y el estado antes y despues del cambio en JSON.</a:t>
+              <a:t>audit_logs conserva actor, acción, entidad, resumen y el estado antes y después del cambio en JSON.</a:t>
             </a:r>
           </a:p>
         </p:txBody>
@@ -11844,7 +11844,7 @@
                 </a:solidFill>
                 <a:latin typeface="Segoe UI"/>
               </a:rPr>
-              <a:t>El historico de lesson_progress y assessment_attempts nunca se borra por una edicion administrativa.</a:t>
+              <a:t>El histórico de lesson_progress y assessment_attempts nunca se borra por una edición administrativa.</a:t>
             </a:r>
           </a:p>
         </p:txBody>
@@ -11978,7 +11978,7 @@
                 </a:solidFill>
                 <a:latin typeface="Segoe UI"/>
               </a:rPr>
-              <a:t>Verificacion publica</a:t>
+              <a:t>Verificación pública</a:t>
             </a:r>
           </a:p>
           <a:p>
@@ -11997,7 +11997,7 @@
                 </a:solidFill>
                 <a:latin typeface="Segoe UI"/>
               </a:rPr>
-              <a:t>Los certificados se validan sin iniciar sesion mediante codigo unico y QR.</a:t>
+              <a:t>Los certificados se validan sin iniciar sesión mediante código único y QR.</a:t>
             </a:r>
           </a:p>
         </p:txBody>
@@ -12249,7 +12249,7 @@
                 </a:solidFill>
                 <a:latin typeface="Segoe UI"/>
               </a:rPr>
-              <a:t>KG Academy  ·  KG Gestion Integral S.A.S.  ·  Desarrollado por Diego Alejandro Hernandez Blanco</a:t>
+              <a:t>KG Academy  ·  KG Gestión Integral S.A.S.  ·  Desarrollado por Diego Alejandro Hernández Blanco</a:t>
             </a:r>
           </a:p>
         </p:txBody>
@@ -12566,7 +12566,7 @@
                 </a:solidFill>
                 <a:latin typeface="Segoe UI"/>
               </a:rPr>
-              <a:t>Autenticacion, roles y permisos</a:t>
+              <a:t>Autenticación, roles y permisos</a:t>
             </a:r>
           </a:p>
         </p:txBody>
@@ -12652,7 +12652,7 @@
                 </a:solidFill>
                 <a:latin typeface="Segoe UI"/>
               </a:rPr>
-              <a:t>Catalogo y aula virtual</a:t>
+              <a:t>Catálogo y aula virtual</a:t>
             </a:r>
           </a:p>
         </p:txBody>
@@ -12824,7 +12824,7 @@
                 </a:solidFill>
                 <a:latin typeface="Segoe UI"/>
               </a:rPr>
-              <a:t>Certificados con QR y verificacion</a:t>
+              <a:t>Certificados con QR y verificación</a:t>
             </a:r>
           </a:p>
         </p:txBody>
@@ -12996,7 +12996,7 @@
                 </a:solidFill>
                 <a:latin typeface="Segoe UI"/>
               </a:rPr>
-              <a:t>Reportes CSV y auditoria</a:t>
+              <a:t>Reportes CSV y auditoría</a:t>
             </a:r>
           </a:p>
         </p:txBody>
@@ -13357,7 +13357,7 @@
                 </a:solidFill>
                 <a:latin typeface="Segoe UI"/>
               </a:rPr>
-              <a:t>Envio de correo (SMTP)</a:t>
+              <a:t>Envío de correo (SMTP)</a:t>
             </a:r>
           </a:p>
         </p:txBody>
@@ -13529,7 +13529,7 @@
                 </a:solidFill>
                 <a:latin typeface="Segoe UI"/>
               </a:rPr>
-              <a:t>Exportacion de reportes en PDF</a:t>
+              <a:t>Exportación de reportes en PDF</a:t>
             </a:r>
           </a:p>
         </p:txBody>
@@ -14337,7 +14337,7 @@
                 </a:solidFill>
                 <a:latin typeface="Segoe UI"/>
               </a:rPr>
-              <a:t>Aplicacion movil nativa</a:t>
+              <a:t>Aplicación movil nativa</a:t>
             </a:r>
           </a:p>
         </p:txBody>
@@ -14595,7 +14595,7 @@
                 </a:solidFill>
                 <a:latin typeface="Segoe UI"/>
               </a:rPr>
-              <a:t>API publica para clientes</a:t>
+              <a:t>API pública para clientes</a:t>
             </a:r>
           </a:p>
         </p:txBody>
@@ -14786,7 +14786,7 @@
                 </a:solidFill>
                 <a:latin typeface="Segoe UI"/>
               </a:rPr>
-              <a:t>Formacion que protege vidas, con la evidencia que su empresa necesita.</a:t>
+              <a:t>Formación que protege vidas, con la evidencia que su empresa necesita.</a:t>
             </a:r>
           </a:p>
           <a:p>
@@ -14805,7 +14805,7 @@
                 </a:solidFill>
                 <a:latin typeface="Segoe UI"/>
               </a:rPr>
-              <a:t>KG GESTION INTEGRAL S.A.S.  ·  KATERINE GUANARITA</a:t>
+              <a:t>KG GESTIÓN INTEGRAL S.A.S.  ·  KATERINE GUAÑARITA</a:t>
             </a:r>
           </a:p>
         </p:txBody>
@@ -14893,7 +14893,7 @@
                 </a:solidFill>
                 <a:latin typeface="Segoe UI"/>
               </a:rPr>
-              <a:t>Disenado y desarrollado por Diego Alejandro Hernandez Blanco</a:t>
+              <a:t>Diseñado y desarrollado por Diego Alejandro Hernández Blanco</a:t>
             </a:r>
           </a:p>
         </p:txBody>
@@ -15126,7 +15126,7 @@
                 </a:solidFill>
                 <a:latin typeface="Segoe UI"/>
               </a:rPr>
-              <a:t>KG Academy  ·  KG Gestion Integral S.A.S.  ·  Desarrollado por Diego Alejandro Hernandez Blanco</a:t>
+              <a:t>KG Academy  ·  KG Gestión Integral S.A.S.  ·  Desarrollado por Diego Alejandro Hernández Blanco</a:t>
             </a:r>
           </a:p>
         </p:txBody>
@@ -15313,7 +15313,7 @@
                 </a:solidFill>
                 <a:latin typeface="Segoe UI"/>
               </a:rPr>
-              <a:t>Vision general y alcance</a:t>
+              <a:t>Visión general y alcance</a:t>
             </a:r>
           </a:p>
           <a:p>
@@ -15477,7 +15477,7 @@
                 </a:solidFill>
                 <a:latin typeface="Segoe UI"/>
               </a:rPr>
-              <a:t>Arquitectura de la solucion</a:t>
+              <a:t>Arquitectura de la solución</a:t>
             </a:r>
           </a:p>
           <a:p>
@@ -15496,7 +15496,7 @@
                 </a:solidFill>
                 <a:latin typeface="Segoe UI"/>
               </a:rPr>
-              <a:t>Capas, responsabilidades y flujo de una peticion</a:t>
+              <a:t>Capas, responsabilidades y flujo de una petición</a:t>
             </a:r>
           </a:p>
         </p:txBody>
@@ -15641,7 +15641,7 @@
                 </a:solidFill>
                 <a:latin typeface="Segoe UI"/>
               </a:rPr>
-              <a:t>Stack tecnologico</a:t>
+              <a:t>Stack tecnológico</a:t>
             </a:r>
           </a:p>
           <a:p>
@@ -15660,7 +15660,7 @@
                 </a:solidFill>
                 <a:latin typeface="Segoe UI"/>
               </a:rPr>
-              <a:t>Tecnologias elegidas y justificacion</a:t>
+              <a:t>Tecnologías elegidas y justificación</a:t>
             </a:r>
           </a:p>
         </p:txBody>
@@ -16297,7 +16297,7 @@
                 </a:solidFill>
                 <a:latin typeface="Segoe UI"/>
               </a:rPr>
-              <a:t>Motor de progreso y certificacion</a:t>
+              <a:t>Motor de progreso y certificación</a:t>
             </a:r>
           </a:p>
           <a:p>
@@ -16461,7 +16461,7 @@
                 </a:solidFill>
                 <a:latin typeface="Segoe UI"/>
               </a:rPr>
-              <a:t>Seguridad, permisos y auditoria</a:t>
+              <a:t>Seguridad, permisos y auditoría</a:t>
             </a:r>
           </a:p>
           <a:p>
@@ -16644,7 +16644,7 @@
                 </a:solidFill>
                 <a:latin typeface="Segoe UI"/>
               </a:rPr>
-              <a:t>Que esta listo y que sigue</a:t>
+              <a:t>Qué está listo y que sigue</a:t>
             </a:r>
           </a:p>
         </p:txBody>
@@ -16816,7 +16816,7 @@
                 </a:solidFill>
                 <a:latin typeface="Segoe UI"/>
               </a:rPr>
-              <a:t>01 · VISION GENERAL</a:t>
+              <a:t>01 · VISIÓN GENERAL</a:t>
             </a:r>
           </a:p>
           <a:p>
@@ -16835,7 +16835,7 @@
                 </a:solidFill>
                 <a:latin typeface="Segoe UI"/>
               </a:rPr>
-              <a:t>Que es KG Academy</a:t>
+              <a:t>Qué es KG Academy</a:t>
             </a:r>
           </a:p>
           <a:p>
@@ -16854,7 +16854,7 @@
                 </a:solidFill>
                 <a:latin typeface="Segoe UI"/>
               </a:rPr>
-              <a:t>Plataforma tipo LMS/marketplace que combina formacion virtual con gestion corporativa de la capacitacion.</a:t>
+              <a:t>Plataforma tipo LMS/marketplace que combina formación virtual con gestión corporativa de la capacitación.</a:t>
             </a:r>
           </a:p>
         </p:txBody>
@@ -16896,7 +16896,7 @@
                 </a:solidFill>
                 <a:latin typeface="Segoe UI"/>
               </a:rPr>
-              <a:t>KG Academy  ·  KG Gestion Integral S.A.S.  ·  Desarrollado por Diego Alejandro Hernandez Blanco</a:t>
+              <a:t>KG Academy  ·  KG Gestión Integral S.A.S.  ·  Desarrollado por Diego Alejandro Hernández Blanco</a:t>
             </a:r>
           </a:p>
         </p:txBody>
@@ -17116,7 +17116,7 @@
                 </a:solidFill>
                 <a:latin typeface="Segoe UI"/>
               </a:rPr>
-              <a:t>Se registra, compra o accede a cursos, estudia, se evalua y descarga su certificado.</a:t>
+              <a:t>Se registra, compra o accede a cursos, estudia, se evalúa y descarga su certificado.</a:t>
             </a:r>
           </a:p>
         </p:txBody>
@@ -17294,7 +17294,7 @@
                 </a:solidFill>
                 <a:latin typeface="Segoe UI"/>
               </a:rPr>
-              <a:t>Carga trabajadores, asigna cursos con fecha limite y consulta cumplimiento por area, cargo y sede.</a:t>
+              <a:t>Carga trabajadores, asigna cursos con fecha límite y consulta cumplimiento por área, cargo y sede.</a:t>
             </a:r>
           </a:p>
         </p:txBody>
@@ -17430,7 +17430,7 @@
                 </a:solidFill>
                 <a:latin typeface="Segoe UI"/>
               </a:rPr>
-              <a:t>KG  ·  Administracion</a:t>
+              <a:t>KG  ·  Administración</a:t>
             </a:r>
           </a:p>
         </p:txBody>
@@ -17648,7 +17648,7 @@
                 </a:solidFill>
                 <a:latin typeface="Segoe UI"/>
               </a:rPr>
-              <a:t>Autenticacion, registro y gestion de sesiones</a:t>
+              <a:t>Autenticación, registro y gestión de sesiones</a:t>
             </a:r>
           </a:p>
         </p:txBody>
@@ -17734,7 +17734,7 @@
                 </a:solidFill>
                 <a:latin typeface="Segoe UI"/>
               </a:rPr>
-              <a:t>Roles, permisos y separacion por empresa</a:t>
+              <a:t>Roles, permisos y separación por empresa</a:t>
             </a:r>
           </a:p>
         </p:txBody>
@@ -17820,7 +17820,7 @@
                 </a:solidFill>
                 <a:latin typeface="Segoe UI"/>
               </a:rPr>
-              <a:t>Catalogo, ficha de curso y matricula</a:t>
+              <a:t>Catálogo, ficha de curso y matrícula</a:t>
             </a:r>
           </a:p>
         </p:txBody>
@@ -17906,7 +17906,7 @@
                 </a:solidFill>
                 <a:latin typeface="Segoe UI"/>
               </a:rPr>
-              <a:t>Aula virtual con progreso leccion a leccion</a:t>
+              <a:t>Aula virtual con progreso lección a lección</a:t>
             </a:r>
           </a:p>
         </p:txBody>
@@ -17992,7 +17992,7 @@
                 </a:solidFill>
                 <a:latin typeface="Segoe UI"/>
               </a:rPr>
-              <a:t>Evaluaciones con calificacion automatica</a:t>
+              <a:t>Evaluaciones con calificación automática</a:t>
             </a:r>
           </a:p>
         </p:txBody>
@@ -18078,7 +18078,7 @@
                 </a:solidFill>
                 <a:latin typeface="Segoe UI"/>
               </a:rPr>
-              <a:t>Certificados con codigo unico y QR</a:t>
+              <a:t>Certificados con código único y QR</a:t>
             </a:r>
           </a:p>
         </p:txBody>
@@ -18164,7 +18164,7 @@
                 </a:solidFill>
                 <a:latin typeface="Segoe UI"/>
               </a:rPr>
-              <a:t>Panel empresarial con asignacion masiva</a:t>
+              <a:t>Panel empresarial con asignación masiva</a:t>
             </a:r>
           </a:p>
         </p:txBody>
@@ -18508,7 +18508,7 @@
                 </a:solidFill>
                 <a:latin typeface="Segoe UI"/>
               </a:rPr>
-              <a:t>Gamificacion: puntos, insignias y rachas</a:t>
+              <a:t>Gamificación: puntos, insignias y rachas</a:t>
             </a:r>
           </a:p>
         </p:txBody>
@@ -18594,7 +18594,7 @@
                 </a:solidFill>
                 <a:latin typeface="Segoe UI"/>
               </a:rPr>
-              <a:t>Auditoria de acciones relevantes</a:t>
+              <a:t>Auditoría de acciones relevantes</a:t>
             </a:r>
           </a:p>
         </p:txBody>
@@ -18785,7 +18785,7 @@
                 </a:solidFill>
                 <a:latin typeface="Segoe UI"/>
               </a:rPr>
-              <a:t>Arquitectura de la solucion</a:t>
+              <a:t>Arquitectura de la solución</a:t>
             </a:r>
           </a:p>
           <a:p>
@@ -18804,7 +18804,7 @@
                 </a:solidFill>
                 <a:latin typeface="Segoe UI"/>
               </a:rPr>
-              <a:t>Aplicacion full-stack monolitica modular: el mismo proyecto sirve la interfaz y la API, sobre una unica base de datos relacional.</a:t>
+              <a:t>Aplicación full-stack monolítica modular: el mismo proyecto sirve la interfaz y la API, sobre una única base de datos relacional.</a:t>
             </a:r>
           </a:p>
         </p:txBody>
@@ -18846,7 +18846,7 @@
                 </a:solidFill>
                 <a:latin typeface="Segoe UI"/>
               </a:rPr>
-              <a:t>KG Academy  ·  KG Gestion Integral S.A.S.  ·  Desarrollado por Diego Alejandro Hernandez Blanco</a:t>
+              <a:t>KG Academy  ·  KG Gestión Integral S.A.S.  ·  Desarrollado por Diego Alejandro Hernández Blanco</a:t>
             </a:r>
           </a:p>
         </p:txBody>
@@ -18976,7 +18976,7 @@
                 </a:solidFill>
                 <a:latin typeface="Segoe UI"/>
               </a:rPr>
-              <a:t>CAPA DE PRESENTACION</a:t>
+              <a:t>CAPA DE PRESENTACIÓN</a:t>
             </a:r>
           </a:p>
           <a:p>
@@ -19037,7 +19037,7 @@
                 </a:solidFill>
                 <a:latin typeface="Segoe UI"/>
               </a:rPr>
-              <a:t>Landing · Catalogo · Aula virtual · Panel empresarial · Panel SuperAdmin · Verificacion publica</a:t>
+              <a:t>Landing · Catálogo · Aula virtual · Panel empresarial · Panel SuperAdmin · Verificación pública</a:t>
             </a:r>
           </a:p>
         </p:txBody>
@@ -19125,7 +19125,7 @@
                 </a:solidFill>
                 <a:latin typeface="Segoe UI"/>
               </a:rPr>
-              <a:t>CAPA DE APLICACION</a:t>
+              <a:t>CAPA DE APLICACIÓN</a:t>
             </a:r>
           </a:p>
           <a:p>
@@ -19186,7 +19186,7 @@
                 </a:solidFill>
                 <a:latin typeface="Segoe UI"/>
               </a:rPr>
-              <a:t>/api/auth · /api/aula · /api/empresa · /api/admin  —  validacion con Zod en cada endpoint</a:t>
+              <a:t>/api/auth · /api/aula · /api/empresa · /api/admin  —  validación con Zod en cada endpoint</a:t>
             </a:r>
           </a:p>
         </p:txBody>
@@ -19335,7 +19335,7 @@
                 </a:solidFill>
                 <a:latin typeface="Segoe UI"/>
               </a:rPr>
-              <a:t>Motor de progreso · Calificacion de evaluaciones · Emision de certificados · RBAC · Auditoria</a:t>
+              <a:t>Motor de progreso · Calificación de evaluaciones · Emisión de certificados · RBAC · Auditoría</a:t>
             </a:r>
           </a:p>
         </p:txBody>
@@ -19484,7 +19484,7 @@
                 </a:solidFill>
                 <a:latin typeface="Segoe UI"/>
               </a:rPr>
-              <a:t>44 tablas · migraciones versionadas · SQLite en local / PostgreSQL en produccion</a:t>
+              <a:t>44 tablas · migraciones versionadas · SQLite en local / PostgreSQL en producción</a:t>
             </a:r>
           </a:p>
         </p:txBody>
@@ -19574,7 +19574,7 @@
                 </a:solidFill>
                 <a:latin typeface="Segoe UI"/>
               </a:rPr>
-              <a:t>Flujo de una peticion:  Navegador  →  Server Component / Route Handler  →  Servicio de dominio  →  Prisma  →  Base de datos  →  Respuesta renderizada en servidor</a:t>
+              <a:t>Flujo de una petición:  Navegador  →  Server Component / Route Handler  →  Servicio de dominio  →  Prisma  →  Base de datos  →  Respuesta renderizada en servidor</a:t>
             </a:r>
           </a:p>
         </p:txBody>
@@ -19765,7 +19765,7 @@
                 </a:solidFill>
                 <a:latin typeface="Segoe UI"/>
               </a:rPr>
-              <a:t>Stack tecnologico</a:t>
+              <a:t>Stack tecnológico</a:t>
             </a:r>
           </a:p>
           <a:p>
@@ -19784,7 +19784,7 @@
                 </a:solidFill>
                 <a:latin typeface="Segoe UI"/>
               </a:rPr>
-              <a:t>Tecnologias seleccionadas para un despliegue economico, mantenible y facil de entregar a KG.</a:t>
+              <a:t>Tecnologías seleccionadas para un despliegue economico, mantenible y fácil de entregar a KG.</a:t>
             </a:r>
           </a:p>
         </p:txBody>
@@ -19826,7 +19826,7 @@
                 </a:solidFill>
                 <a:latin typeface="Segoe UI"/>
               </a:rPr>
-              <a:t>KG Academy  ·  KG Gestion Integral S.A.S.  ·  Desarrollado por Diego Alejandro Hernandez Blanco</a:t>
+              <a:t>KG Academy  ·  KG Gestión Integral S.A.S.  ·  Desarrollado por Diego Alejandro Hernández Blanco</a:t>
             </a:r>
           </a:p>
         </p:txBody>
@@ -19931,7 +19931,7 @@
                           </a:solidFill>
                           <a:latin typeface="Segoe UI"/>
                         </a:rPr>
-                        <a:t>Tecnologia</a:t>
+                        <a:t>Tecnología</a:t>
                       </a:r>
                     </a:p>
                   </a:txBody>
@@ -20021,7 +20021,7 @@
                           </a:solidFill>
                           <a:latin typeface="Segoe UI"/>
                         </a:rPr>
-                        <a:t>Tipado estatico de extremo a extremo: menos errores en produccion.</a:t>
+                        <a:t>Tipado estático de extremo a extremo: menos errores en producción.</a:t>
                       </a:r>
                     </a:p>
                   </a:txBody>
@@ -20225,7 +20225,7 @@
                           </a:solidFill>
                           <a:latin typeface="Segoe UI"/>
                         </a:rPr>
-                        <a:t>Modelo unico, migraciones versionadas y consultas con tipos.</a:t>
+                        <a:t>Modelo único, migraciones versionadas y consultas con tipos.</a:t>
                       </a:r>
                     </a:p>
                   </a:txBody>
@@ -20271,7 +20271,7 @@
                           </a:solidFill>
                           <a:latin typeface="Segoe UI"/>
                         </a:rPr>
-                        <a:t>SQLite (local) / PostgreSQL (produccion)</a:t>
+                        <a:t>SQLite (local) / PostgreSQL (producción)</a:t>
                       </a:r>
                     </a:p>
                   </a:txBody>
@@ -20317,7 +20317,7 @@
                           </a:solidFill>
                           <a:latin typeface="Segoe UI"/>
                         </a:rPr>
-                        <a:t>Autenticacion</a:t>
+                        <a:t>Autenticación</a:t>
                       </a:r>
                     </a:p>
                   </a:txBody>
@@ -20361,7 +20361,7 @@
                           </a:solidFill>
                           <a:latin typeface="Segoe UI"/>
                         </a:rPr>
-                        <a:t>Sesion de 8 horas, sin dependencias externas de pago.</a:t>
+                        <a:t>Sesión de 8 horas, sin dependencias externas de pago.</a:t>
                       </a:r>
                     </a:p>
                   </a:txBody>
@@ -20385,7 +20385,7 @@
                           </a:solidFill>
                           <a:latin typeface="Segoe UI"/>
                         </a:rPr>
-                        <a:t>Contrasenas</a:t>
+                        <a:t>Contraseñas</a:t>
                       </a:r>
                     </a:p>
                   </a:txBody>
@@ -20429,7 +20429,7 @@
                           </a:solidFill>
                           <a:latin typeface="Segoe UI"/>
                         </a:rPr>
-                        <a:t>Nunca se almacena la contrasena en texto plano.</a:t>
+                        <a:t>Nunca se almacena la contraseña en texto plano.</a:t>
                       </a:r>
                     </a:p>
                   </a:txBody>
@@ -20453,7 +20453,7 @@
                           </a:solidFill>
                           <a:latin typeface="Segoe UI"/>
                         </a:rPr>
-                        <a:t>Validacion</a:t>
+                        <a:t>Validación</a:t>
                       </a:r>
                     </a:p>
                   </a:txBody>
@@ -20497,7 +20497,7 @@
                           </a:solidFill>
                           <a:latin typeface="Segoe UI"/>
                         </a:rPr>
-                        <a:t>Cada endpoint valida su entrada antes de tocar la base de datos.</a:t>
+                        <a:t>Cada endpoint válida su entrada antes de tocar la base de datos.</a:t>
                       </a:r>
                     </a:p>
                   </a:txBody>
@@ -20853,7 +20853,7 @@
                 </a:solidFill>
                 <a:latin typeface="Segoe UI"/>
               </a:rPr>
-              <a:t>Ambiente local para revision y ambiente productivo sobre Hostinger, segun el requisito tecnico del esqueleto funcional.</a:t>
+              <a:t>Ambiente local para revisión y ambiente productivo sobre Hostinger, según el requisito técnico del esqueleto funcional.</a:t>
             </a:r>
           </a:p>
         </p:txBody>
@@ -20895,7 +20895,7 @@
                 </a:solidFill>
                 <a:latin typeface="Segoe UI"/>
               </a:rPr>
-              <a:t>KG Academy  ·  KG Gestion Integral S.A.S.  ·  Desarrollado por Diego Alejandro Hernandez Blanco</a:t>
+              <a:t>KG Academy  ·  KG Gestión Integral S.A.S.  ·  Desarrollado por Diego Alejandro Hernández Blanco</a:t>
             </a:r>
           </a:p>
         </p:txBody>
@@ -21073,7 +21073,7 @@
                 </a:solidFill>
                 <a:latin typeface="Segoe UI"/>
               </a:rPr>
-              <a:t>AMBIENTE LOCAL  ·  DESARROLLO Y REVISION</a:t>
+              <a:t>AMBIENTE LOCAL  ·  DESARROLLO Y REVISIÓN</a:t>
             </a:r>
           </a:p>
         </p:txBody>
@@ -21272,7 +21272,7 @@
                 </a:solidFill>
                 <a:latin typeface="Segoe UI"/>
               </a:rPr>
-              <a:t>Servidor de aplicacion</a:t>
+              <a:t>Servidor de aplicación</a:t>
             </a:r>
           </a:p>
           <a:p>
@@ -21490,7 +21490,7 @@
                 </a:solidFill>
                 <a:latin typeface="Segoe UI"/>
               </a:rPr>
-              <a:t>Archivos estaticos</a:t>
+              <a:t>Archivos estáticos</a:t>
             </a:r>
           </a:p>
           <a:p>
@@ -21953,7 +21953,7 @@
                 </a:solidFill>
                 <a:latin typeface="Segoe UI"/>
               </a:rPr>
-              <a:t>Servidor de aplicacion</a:t>
+              <a:t>Servidor de aplicación</a:t>
             </a:r>
           </a:p>
           <a:p>
@@ -22341,7 +22341,7 @@
                 </a:solidFill>
                 <a:latin typeface="Segoe UI"/>
               </a:rPr>
-              <a:t>Migrar de local a produccion solo requiere cambiar DATABASE_URL y el provider de Prisma a "postgresql". El resto del codigo permanece identico.</a:t>
+              <a:t>Migrar de local a producción solo requiere cambiar DATABASE_URL y el provider de Prisma a "postgresql". El resto del código permanece identico.</a:t>
             </a:r>
           </a:p>
         </p:txBody>
@@ -22593,7 +22593,7 @@
                 </a:solidFill>
                 <a:latin typeface="Segoe UI"/>
               </a:rPr>
-              <a:t>KG Academy  ·  KG Gestion Integral S.A.S.  ·  Desarrollado por Diego Alejandro Hernandez Blanco</a:t>
+              <a:t>KG Academy  ·  KG Gestión Integral S.A.S.  ·  Desarrollado por Diego Alejandro Hernández Blanco</a:t>
             </a:r>
           </a:p>
         </p:txBody>
@@ -22941,7 +22941,7 @@
                 </a:solidFill>
                 <a:latin typeface="Segoe UI"/>
               </a:rPr>
-              <a:t>companies · company_locations · areas · positions · company_members</a:t>
+              <a:t>companies · company_locations · áreas · positions · company_members</a:t>
             </a:r>
           </a:p>
         </p:txBody>
@@ -23228,7 +23228,7 @@
                 </a:solidFill>
                 <a:latin typeface="Segoe UI"/>
               </a:rPr>
-              <a:t>4. Catalogo de cursos</a:t>
+              <a:t>4. Catálogo de cursos</a:t>
             </a:r>
           </a:p>
           <a:p>
@@ -23381,7 +23381,7 @@
                 </a:solidFill>
                 <a:latin typeface="Segoe UI"/>
               </a:rPr>
-              <a:t>5. Matricula y progreso</a:t>
+              <a:t>5. Matrícula y progreso</a:t>
             </a:r>
           </a:p>
           <a:p>
@@ -23840,7 +23840,7 @@
                 </a:solidFill>
                 <a:latin typeface="Segoe UI"/>
               </a:rPr>
-              <a:t>8. Asignacion empresarial</a:t>
+              <a:t>8. Asignación empresarial</a:t>
             </a:r>
           </a:p>
           <a:p>
@@ -24146,7 +24146,7 @@
                 </a:solidFill>
                 <a:latin typeface="Segoe UI"/>
               </a:rPr>
-              <a:t>10. Notificaciones y gamificacion</a:t>
+              <a:t>10. Notificaciones y gamificación</a:t>
             </a:r>
           </a:p>
           <a:p>
@@ -24635,7 +24635,7 @@
                 </a:solidFill>
                 <a:latin typeface="Segoe UI"/>
               </a:rPr>
-              <a:t>Quien entra a la plataforma y que puede hacer</a:t>
+              <a:t>Quién entra a la plataforma y que puede hacer</a:t>
             </a:r>
           </a:p>
         </p:txBody>
@@ -24677,7 +24677,7 @@
                 </a:solidFill>
                 <a:latin typeface="Segoe UI"/>
               </a:rPr>
-              <a:t>KG Academy  ·  KG Gestion Integral S.A.S.  ·  Desarrollado por Diego Alejandro Hernandez Blanco</a:t>
+              <a:t>KG Academy  ·  KG Gestión Integral S.A.S.  ·  Desarrollado por Diego Alejandro Hernández Blanco</a:t>
             </a:r>
           </a:p>
         </p:txBody>
@@ -24963,7 +24963,7 @@
                           </a:solidFill>
                           <a:latin typeface="Segoe UI"/>
                         </a:rPr>
-                        <a:t>Catalogo granular de permisos (modulo.accion)</a:t>
+                        <a:t>Catálogo granular de permisos (módulo.acción)</a:t>
                       </a:r>
                     </a:p>
                   </a:txBody>
@@ -25143,7 +25143,7 @@
                           </a:solidFill>
                           <a:latin typeface="Segoe UI"/>
                         </a:rPr>
-                        <a:t>Usuario unico (estudiante, trabajador, instructor o staff KG)</a:t>
+                        <a:t>Usuario único (estudiante, trabajador, instructor o staff KG)</a:t>
                       </a:r>
                     </a:p>
                   </a:txBody>
@@ -25323,7 +25323,7 @@
                           </a:solidFill>
                           <a:latin typeface="Segoe UI"/>
                         </a:rPr>
-                        <a:t>Tokens de recuperacion de contrasena</a:t>
+                        <a:t>Tokens de recuperación de contraseña</a:t>
                       </a:r>
                     </a:p>
                   </a:txBody>
@@ -25629,7 +25629,7 @@
                 </a:solidFill>
                 <a:latin typeface="Segoe UI"/>
               </a:rPr>
-              <a:t>KG Academy  ·  KG Gestion Integral S.A.S.  ·  Desarrollado por Diego Alejandro Hernandez Blanco</a:t>
+              <a:t>KG Academy  ·  KG Gestión Integral S.A.S.  ·  Desarrollado por Diego Alejandro Hernández Blanco</a:t>
             </a:r>
           </a:p>
         </p:txBody>
@@ -25869,7 +25869,7 @@
                           </a:solidFill>
                           <a:latin typeface="Segoe UI"/>
                         </a:rPr>
-                        <a:t>1:N members, areas, positions</a:t>
+                        <a:t>1:N members, áreas, positions</a:t>
                       </a:r>
                     </a:p>
                   </a:txBody>
@@ -26005,7 +26005,7 @@
                           </a:solidFill>
                           <a:latin typeface="Segoe UI"/>
                         </a:rPr>
-                        <a:t>Areas o departamentos</a:t>
+                        <a:t>Áreas o departamentos</a:t>
                       </a:r>
                     </a:p>
                   </a:txBody>
@@ -26229,7 +26229,7 @@
                           </a:solidFill>
                           <a:latin typeface="Segoe UI"/>
                         </a:rPr>
-                        <a:t>N:1 users, companies, areas</a:t>
+                        <a:t>N:1 users, companies, áreas</a:t>
                       </a:r>
                     </a:p>
                   </a:txBody>
